--- a/poster_ieeai2026_professional.pptx
+++ b/poster_ieeai2026_professional.pptx
@@ -3469,7 +3469,7 @@
               <a:spcAft>
                 <a:spcPts val="800"/>
               </a:spcAft>
-              <a:defRPr sz="2800">
+              <a:defRPr sz="3200">
                 <a:solidFill>
                   <a:srgbClr val="232D3A"/>
                 </a:solidFill>
@@ -3488,7 +3488,7 @@
               <a:spcAft>
                 <a:spcPts val="800"/>
               </a:spcAft>
-              <a:defRPr sz="2800">
+              <a:defRPr sz="3200">
                 <a:solidFill>
                   <a:srgbClr val="232D3A"/>
                 </a:solidFill>
@@ -3507,7 +3507,7 @@
               <a:spcAft>
                 <a:spcPts val="800"/>
               </a:spcAft>
-              <a:defRPr sz="2800">
+              <a:defRPr sz="3200">
                 <a:solidFill>
                   <a:srgbClr val="232D3A"/>
                 </a:solidFill>
@@ -3526,7 +3526,7 @@
               <a:spcAft>
                 <a:spcPts val="800"/>
               </a:spcAft>
-              <a:defRPr sz="2800">
+              <a:defRPr sz="3200">
                 <a:solidFill>
                   <a:srgbClr val="232D3A"/>
                 </a:solidFill>
@@ -3691,7 +3691,7 @@
               <a:lnSpc>
                 <a:spcPct val="130000"/>
               </a:lnSpc>
-              <a:defRPr sz="2800" b="1">
+              <a:defRPr sz="3200" b="1">
                 <a:solidFill>
                   <a:srgbClr val="232D3A"/>
                 </a:solidFill>
@@ -3733,7 +3733,7 @@
               <a:spcAft>
                 <a:spcPts val="800"/>
               </a:spcAft>
-              <a:defRPr sz="2600">
+              <a:defRPr sz="3000">
                 <a:solidFill>
                   <a:srgbClr val="232D3A"/>
                 </a:solidFill>
@@ -3752,7 +3752,7 @@
               <a:spcAft>
                 <a:spcPts val="800"/>
               </a:spcAft>
-              <a:defRPr sz="2600">
+              <a:defRPr sz="3000">
                 <a:solidFill>
                   <a:srgbClr val="232D3A"/>
                 </a:solidFill>
@@ -3771,7 +3771,7 @@
               <a:spcAft>
                 <a:spcPts val="800"/>
               </a:spcAft>
-              <a:defRPr sz="2600">
+              <a:defRPr sz="3000">
                 <a:solidFill>
                   <a:srgbClr val="232D3A"/>
                 </a:solidFill>
@@ -3810,7 +3810,7 @@
               <a:lnSpc>
                 <a:spcPct val="130000"/>
               </a:lnSpc>
-              <a:defRPr sz="2400" b="0">
+              <a:defRPr sz="2800" b="0">
                 <a:solidFill>
                   <a:srgbClr val="5F6973"/>
                 </a:solidFill>
@@ -3883,11 +3883,11 @@
             <a:avLst/>
           </a:prstGeom>
           <a:solidFill>
-            <a:srgbClr val="DBA023"/>
+            <a:srgbClr val="18437A"/>
           </a:solidFill>
           <a:ln>
             <a:solidFill>
-              <a:srgbClr val="DBA023"/>
+              <a:srgbClr val="18437A"/>
             </a:solidFill>
           </a:ln>
         </p:spPr>
@@ -3978,7 +3978,7 @@
               <a:spcAft>
                 <a:spcPts val="800"/>
               </a:spcAft>
-              <a:defRPr sz="2600">
+              <a:defRPr sz="3000">
                 <a:solidFill>
                   <a:srgbClr val="232D3A"/>
                 </a:solidFill>
@@ -3997,7 +3997,7 @@
               <a:spcAft>
                 <a:spcPts val="800"/>
               </a:spcAft>
-              <a:defRPr sz="2600">
+              <a:defRPr sz="3000">
                 <a:solidFill>
                   <a:srgbClr val="232D3A"/>
                 </a:solidFill>
@@ -4016,7 +4016,7 @@
               <a:spcAft>
                 <a:spcPts val="800"/>
               </a:spcAft>
-              <a:defRPr sz="2600">
+              <a:defRPr sz="3000">
                 <a:solidFill>
                   <a:srgbClr val="232D3A"/>
                 </a:solidFill>
@@ -4497,7 +4497,7 @@
         <p:spPr>
           <a:xfrm>
             <a:off x="15677999" y="18900000"/>
-            <a:ext cx="6488999" cy="2880000"/>
+            <a:ext cx="6488999" cy="3240000"/>
           </a:xfrm>
           <a:prstGeom prst="roundRect">
             <a:avLst/>
@@ -4542,7 +4542,7 @@
         <p:spPr>
           <a:xfrm>
             <a:off x="15677999" y="19080000"/>
-            <a:ext cx="6488999" cy="900000"/>
+            <a:ext cx="6488999" cy="1080000"/>
           </a:xfrm>
           <a:prstGeom prst="rect">
             <a:avLst/>
@@ -4559,7 +4559,7 @@
               <a:lnSpc>
                 <a:spcPct val="130000"/>
               </a:lnSpc>
-              <a:defRPr sz="7200" b="1">
+              <a:defRPr sz="8500" b="1">
                 <a:solidFill>
                   <a:srgbClr val="258B5D"/>
                 </a:solidFill>
@@ -4580,7 +4580,7 @@
         </p:nvSpPr>
         <p:spPr>
           <a:xfrm>
-            <a:off x="15677999" y="20052000"/>
+            <a:off x="15677999" y="20268000"/>
             <a:ext cx="6488999" cy="540000"/>
           </a:xfrm>
           <a:prstGeom prst="rect">
@@ -4598,7 +4598,7 @@
               <a:lnSpc>
                 <a:spcPct val="130000"/>
               </a:lnSpc>
-              <a:defRPr sz="2400" b="1">
+              <a:defRPr sz="2800" b="1">
                 <a:solidFill>
                   <a:srgbClr val="232D3A"/>
                 </a:solidFill>
@@ -4620,7 +4620,7 @@
         <p:spPr>
           <a:xfrm>
             <a:off x="22347000" y="18900000"/>
-            <a:ext cx="6488999" cy="2880000"/>
+            <a:ext cx="6488999" cy="3240000"/>
           </a:xfrm>
           <a:prstGeom prst="roundRect">
             <a:avLst/>
@@ -4665,7 +4665,7 @@
         <p:spPr>
           <a:xfrm>
             <a:off x="22347000" y="19080000"/>
-            <a:ext cx="6488999" cy="900000"/>
+            <a:ext cx="6488999" cy="1080000"/>
           </a:xfrm>
           <a:prstGeom prst="rect">
             <a:avLst/>
@@ -4682,7 +4682,7 @@
               <a:lnSpc>
                 <a:spcPct val="130000"/>
               </a:lnSpc>
-              <a:defRPr sz="7200" b="1">
+              <a:defRPr sz="8500" b="1">
                 <a:solidFill>
                   <a:srgbClr val="258B5D"/>
                 </a:solidFill>
@@ -4703,7 +4703,7 @@
         </p:nvSpPr>
         <p:spPr>
           <a:xfrm>
-            <a:off x="22347000" y="20052000"/>
+            <a:off x="22347000" y="20268000"/>
             <a:ext cx="6488999" cy="540000"/>
           </a:xfrm>
           <a:prstGeom prst="rect">
@@ -4721,7 +4721,7 @@
               <a:lnSpc>
                 <a:spcPct val="130000"/>
               </a:lnSpc>
-              <a:defRPr sz="2400" b="1">
+              <a:defRPr sz="2800" b="1">
                 <a:solidFill>
                   <a:srgbClr val="232D3A"/>
                 </a:solidFill>
@@ -4742,8 +4742,8 @@
         </p:nvSpPr>
         <p:spPr>
           <a:xfrm>
-            <a:off x="15677999" y="21960000"/>
-            <a:ext cx="6488999" cy="2880000"/>
+            <a:off x="15677999" y="22320000"/>
+            <a:ext cx="6488999" cy="3240000"/>
           </a:xfrm>
           <a:prstGeom prst="roundRect">
             <a:avLst/>
@@ -4753,7 +4753,7 @@
           </a:solidFill>
           <a:ln w="19050">
             <a:solidFill>
-              <a:srgbClr val="1C92BE"/>
+              <a:srgbClr val="18437A"/>
             </a:solidFill>
           </a:ln>
         </p:spPr>
@@ -4787,8 +4787,8 @@
         </p:nvSpPr>
         <p:spPr>
           <a:xfrm>
-            <a:off x="15677999" y="22140000"/>
-            <a:ext cx="6488999" cy="900000"/>
+            <a:off x="15677999" y="22500000"/>
+            <a:ext cx="6488999" cy="1080000"/>
           </a:xfrm>
           <a:prstGeom prst="rect">
             <a:avLst/>
@@ -4805,9 +4805,9 @@
               <a:lnSpc>
                 <a:spcPct val="130000"/>
               </a:lnSpc>
-              <a:defRPr sz="7200" b="1">
+              <a:defRPr sz="8500" b="1">
                 <a:solidFill>
-                  <a:srgbClr val="1C92BE"/>
+                  <a:srgbClr val="18437A"/>
                 </a:solidFill>
                 <a:latin typeface="Arial"/>
               </a:defRPr>
@@ -4826,7 +4826,7 @@
         </p:nvSpPr>
         <p:spPr>
           <a:xfrm>
-            <a:off x="15677999" y="23112000"/>
+            <a:off x="15677999" y="23688000"/>
             <a:ext cx="6488999" cy="540000"/>
           </a:xfrm>
           <a:prstGeom prst="rect">
@@ -4844,7 +4844,7 @@
               <a:lnSpc>
                 <a:spcPct val="130000"/>
               </a:lnSpc>
-              <a:defRPr sz="2400" b="1">
+              <a:defRPr sz="2800" b="1">
                 <a:solidFill>
                   <a:srgbClr val="232D3A"/>
                 </a:solidFill>
@@ -4865,8 +4865,8 @@
         </p:nvSpPr>
         <p:spPr>
           <a:xfrm>
-            <a:off x="22347000" y="21960000"/>
-            <a:ext cx="6488999" cy="2880000"/>
+            <a:off x="22347000" y="22320000"/>
+            <a:ext cx="6488999" cy="3240000"/>
           </a:xfrm>
           <a:prstGeom prst="roundRect">
             <a:avLst/>
@@ -4876,7 +4876,7 @@
           </a:solidFill>
           <a:ln w="19050">
             <a:solidFill>
-              <a:srgbClr val="1C92BE"/>
+              <a:srgbClr val="18437A"/>
             </a:solidFill>
           </a:ln>
         </p:spPr>
@@ -4910,8 +4910,8 @@
         </p:nvSpPr>
         <p:spPr>
           <a:xfrm>
-            <a:off x="22347000" y="22140000"/>
-            <a:ext cx="6488999" cy="900000"/>
+            <a:off x="22347000" y="22500000"/>
+            <a:ext cx="6488999" cy="1080000"/>
           </a:xfrm>
           <a:prstGeom prst="rect">
             <a:avLst/>
@@ -4928,9 +4928,9 @@
               <a:lnSpc>
                 <a:spcPct val="130000"/>
               </a:lnSpc>
-              <a:defRPr sz="7200" b="1">
+              <a:defRPr sz="8500" b="1">
                 <a:solidFill>
-                  <a:srgbClr val="1C92BE"/>
+                  <a:srgbClr val="18437A"/>
                 </a:solidFill>
                 <a:latin typeface="Arial"/>
               </a:defRPr>
@@ -4949,7 +4949,7 @@
         </p:nvSpPr>
         <p:spPr>
           <a:xfrm>
-            <a:off x="22347000" y="23112000"/>
+            <a:off x="22347000" y="23688000"/>
             <a:ext cx="6488999" cy="540000"/>
           </a:xfrm>
           <a:prstGeom prst="rect">
@@ -4967,7 +4967,7 @@
               <a:lnSpc>
                 <a:spcPct val="130000"/>
               </a:lnSpc>
-              <a:defRPr sz="2400" b="1">
+              <a:defRPr sz="2800" b="1">
                 <a:solidFill>
                   <a:srgbClr val="232D3A"/>
                 </a:solidFill>
@@ -5135,7 +5135,7 @@
               <a:spcAft>
                 <a:spcPts val="800"/>
               </a:spcAft>
-              <a:defRPr sz="2600">
+              <a:defRPr sz="3000">
                 <a:solidFill>
                   <a:srgbClr val="232D3A"/>
                 </a:solidFill>
@@ -5154,7 +5154,7 @@
               <a:spcAft>
                 <a:spcPts val="800"/>
               </a:spcAft>
-              <a:defRPr sz="2600">
+              <a:defRPr sz="3000">
                 <a:solidFill>
                   <a:srgbClr val="232D3A"/>
                 </a:solidFill>
@@ -5173,7 +5173,7 @@
               <a:spcAft>
                 <a:spcPts val="800"/>
               </a:spcAft>
-              <a:defRPr sz="2600">
+              <a:defRPr sz="3000">
                 <a:solidFill>
                   <a:srgbClr val="232D3A"/>
                 </a:solidFill>
@@ -5192,7 +5192,7 @@
               <a:spcAft>
                 <a:spcPts val="800"/>
               </a:spcAft>
-              <a:defRPr sz="2600">
+              <a:defRPr sz="3000">
                 <a:solidFill>
                   <a:srgbClr val="232D3A"/>
                 </a:solidFill>
